--- a/modulo-02/02.00_Excelência_em_ABAP_robustez_performance_e_design.pptx
+++ b/modulo-02/02.00_Excelência_em_ABAP_robustez_performance_e_design.pptx
@@ -1194,7 +1194,7 @@
                   <a:srgbClr val="8FA3C7"/>
                 </a:solidFill>
               </a:rPr>
-              <a:t>ABAP Moderno · Módulo 04 — Programação ABAP Intermediária  ·  Visão geral do módulo</a:t>
+              <a:t>ABAP Moderno · Módulo 02 — Programação ABAP Intermediária  ·  Visão geral do módulo</a:t>
             </a:r>
             <a:endParaRPr lang="en-US" sz="900" dirty="0"/>
           </a:p>
@@ -1340,7 +1340,7 @@
                   <a:srgbClr val="556B82"/>
                 </a:solidFill>
               </a:rPr>
-              <a:t>ABAP Moderno · Módulo 04 — Programação ABAP Intermediária  ·  Visão geral do módulo</a:t>
+              <a:t>ABAP Moderno · Módulo 02 — Programação ABAP Intermediária  ·  Visão geral do módulo</a:t>
             </a:r>
             <a:endParaRPr lang="en-US" sz="900" dirty="0"/>
           </a:p>
@@ -1771,7 +1771,7 @@
                   <a:srgbClr val="89D1FF"/>
                 </a:solidFill>
               </a:rPr>
-              <a:t>MÓDULO 04 · VISÃO GERAL</a:t>
+              <a:t>MÓDULO 02 · VISÃO GERAL</a:t>
             </a:r>
             <a:endParaRPr lang="en-US" sz="1400" dirty="0"/>
           </a:p>
@@ -1843,7 +1843,7 @@
                   <a:srgbClr val="D1EFFF"/>
                 </a:solidFill>
               </a:rPr>
-              <a:t>Visão geral do módulo 04: as práticas que transformam código que funciona em código confiável, rápido e fácil de manter.</a:t>
+              <a:t>Visão geral do módulo 02: as práticas que transformam código que funciona em código confiável, rápido e fácil de manter.</a:t>
             </a:r>
             <a:endParaRPr lang="en-US" sz="1700" dirty="0"/>
           </a:p>
@@ -2157,7 +2157,7 @@
                   <a:srgbClr val="8FA3C7"/>
                 </a:solidFill>
               </a:rPr>
-              <a:t>ABAP Moderno · Módulo 04 — Programação ABAP Intermediária · Design System SAP Horizon</a:t>
+              <a:t>ABAP Moderno · Módulo 02 — Programação ABAP Intermediária · Design System SAP Horizon</a:t>
             </a:r>
             <a:endParaRPr lang="en-US" sz="1100" dirty="0"/>
           </a:p>
@@ -3844,7 +3844,7 @@
         </p:blipFill>
         <p:spPr>
           <a:xfrm>
-            <a:off x="4328038" y="1847088"/>
+            <a:off x="6583497" y="1847088"/>
             <a:ext cx="347472" cy="347472"/>
           </a:xfrm>
           <a:prstGeom prst="rect">
@@ -3868,8 +3868,8 @@
         </p:blipFill>
         <p:spPr>
           <a:xfrm>
-            <a:off x="2072579" y="1847088"/>
-            <a:ext cx="347472" cy="347472"/>
+            <a:off x="749808" y="5751576"/>
+            <a:ext cx="310896" cy="310896"/>
           </a:xfrm>
           <a:prstGeom prst="rect">
             <a:avLst/>
@@ -3892,7 +3892,7 @@
         </p:blipFill>
         <p:spPr>
           <a:xfrm>
-            <a:off x="8838956" y="1847088"/>
+            <a:off x="2072579" y="1847088"/>
             <a:ext cx="347472" cy="347472"/>
           </a:xfrm>
           <a:prstGeom prst="rect">
@@ -3916,7 +3916,7 @@
         </p:blipFill>
         <p:spPr>
           <a:xfrm>
-            <a:off x="6583497" y="1847088"/>
+            <a:off x="4328038" y="1847088"/>
             <a:ext cx="347472" cy="347472"/>
           </a:xfrm>
           <a:prstGeom prst="rect">
@@ -3940,7 +3940,7 @@
         </p:blipFill>
         <p:spPr>
           <a:xfrm>
-            <a:off x="11094415" y="1847088"/>
+            <a:off x="8838956" y="1847088"/>
             <a:ext cx="347472" cy="347472"/>
           </a:xfrm>
           <a:prstGeom prst="rect">
@@ -3964,7 +3964,7 @@
         </p:blipFill>
         <p:spPr>
           <a:xfrm>
-            <a:off x="2072579" y="3858768"/>
+            <a:off x="11094415" y="1847088"/>
             <a:ext cx="347472" cy="347472"/>
           </a:xfrm>
           <a:prstGeom prst="rect">
@@ -3988,7 +3988,7 @@
         </p:blipFill>
         <p:spPr>
           <a:xfrm>
-            <a:off x="4328038" y="3858768"/>
+            <a:off x="2072579" y="3858768"/>
             <a:ext cx="347472" cy="347472"/>
           </a:xfrm>
           <a:prstGeom prst="rect">
@@ -4036,8 +4036,8 @@
         </p:blipFill>
         <p:spPr>
           <a:xfrm>
-            <a:off x="749808" y="5751576"/>
-            <a:ext cx="310896" cy="310896"/>
+            <a:off x="4328038" y="3858768"/>
+            <a:ext cx="347472" cy="347472"/>
           </a:xfrm>
           <a:prstGeom prst="rect">
             <a:avLst/>
@@ -4828,7 +4828,7 @@
                   <a:srgbClr val="556B82"/>
                 </a:solidFill>
               </a:rPr>
-              <a:t>Na ordem recomendada </a:t>
+              <a:t>Na jornada </a:t>
             </a:r>
             <a:r>
               <a:rPr lang="en-US" sz="1200" b="1" dirty="0">
@@ -4836,7 +4836,7 @@
                   <a:srgbClr val="556B82"/>
                 </a:solidFill>
               </a:rPr>
-              <a:t>01 → 04 → 02 → 05</a:t>
+              <a:t>01 → 02 → 03 → 04</a:t>
             </a:r>
             <a:r>
               <a:rPr lang="en-US" sz="1200" dirty="0">
@@ -5460,7 +5460,7 @@
                   <a:srgbClr val="89D1FF"/>
                 </a:solidFill>
               </a:rPr>
-              <a:t>MÓDULO 04 · VISÃO GERAL · SEÇÃO 1</a:t>
+              <a:t>MÓDULO 02 · VISÃO GERAL · SEÇÃO 1</a:t>
             </a:r>
             <a:endParaRPr lang="en-US" sz="1300" dirty="0"/>
           </a:p>
@@ -5685,7 +5685,7 @@
                   <a:srgbClr val="D1EFFF"/>
                 </a:solidFill>
               </a:rPr>
-              <a:t>  04.01 · 04.02 · 04.08</a:t>
+              <a:t>  02.01 · 02.02 · 02.08</a:t>
             </a:r>
             <a:endParaRPr lang="en-US" sz="1400" dirty="0"/>
           </a:p>
@@ -5732,7 +5732,7 @@
                   <a:srgbClr val="D1EFFF"/>
                 </a:solidFill>
               </a:rPr>
-              <a:t>  04.04 · 04.05</a:t>
+              <a:t>  02.04 · 02.05</a:t>
             </a:r>
             <a:endParaRPr lang="en-US" sz="1400" dirty="0"/>
           </a:p>
@@ -5779,7 +5779,7 @@
                   <a:srgbClr val="D1EFFF"/>
                 </a:solidFill>
               </a:rPr>
-              <a:t>  04.03 · 04.06 · 04.07 · 04.09</a:t>
+              <a:t>  02.03 · 02.06 · 02.07 · 02.09</a:t>
             </a:r>
             <a:endParaRPr lang="en-US" sz="1400" dirty="0"/>
           </a:p>
@@ -6017,7 +6017,7 @@
                   <a:srgbClr val="556B82"/>
                 </a:solidFill>
               </a:rPr>
-              <a:t>ATC e testes ABAP Unit (04.01)</a:t>
+              <a:t>ATC e testes ABAP Unit (02.01)</a:t>
             </a:r>
             <a:endParaRPr lang="en-US" sz="1400" dirty="0"/>
           </a:p>
@@ -6035,7 +6035,7 @@
                   <a:srgbClr val="556B82"/>
                 </a:solidFill>
               </a:rPr>
-              <a:t>Tipos e conversões sem surpresas (04.02)</a:t>
+              <a:t>Tipos e conversões sem surpresas (02.02)</a:t>
             </a:r>
             <a:endParaRPr lang="en-US" sz="1400" dirty="0"/>
           </a:p>
@@ -6053,7 +6053,7 @@
                   <a:srgbClr val="556B82"/>
                 </a:solidFill>
               </a:rPr>
-              <a:t>Exceções da aplicação (04.08)</a:t>
+              <a:t>Exceções da aplicação (02.08)</a:t>
             </a:r>
             <a:endParaRPr lang="en-US" sz="1400" dirty="0"/>
           </a:p>
@@ -6166,7 +6166,7 @@
                   <a:srgbClr val="556B82"/>
                 </a:solidFill>
               </a:rPr>
-              <a:t>Profiler e SQL Trace (04.01)</a:t>
+              <a:t>Profiler e SQL Trace (02.01)</a:t>
             </a:r>
             <a:endParaRPr lang="en-US" sz="1400" dirty="0"/>
           </a:p>
@@ -6184,7 +6184,7 @@
                   <a:srgbClr val="556B82"/>
                 </a:solidFill>
               </a:rPr>
-              <a:t>Code pushdown no ABAP SQL (04.04)</a:t>
+              <a:t>Code pushdown no ABAP SQL (02.04)</a:t>
             </a:r>
             <a:endParaRPr lang="en-US" sz="1400" dirty="0"/>
           </a:p>
@@ -6202,7 +6202,7 @@
                   <a:srgbClr val="556B82"/>
                 </a:solidFill>
               </a:rPr>
-              <a:t>Tabelas sorted, hashed e chaves secundárias (04.05)</a:t>
+              <a:t>Tabelas sorted, hashed e chaves secundárias (02.05)</a:t>
             </a:r>
             <a:endParaRPr lang="en-US" sz="1400" dirty="0"/>
           </a:p>
@@ -6315,7 +6315,7 @@
                   <a:srgbClr val="556B82"/>
                 </a:solidFill>
               </a:rPr>
-              <a:t>Textos traduzíveis (04.03)</a:t>
+              <a:t>Textos traduzíveis (02.03)</a:t>
             </a:r>
             <a:endParaRPr lang="en-US" sz="1400" dirty="0"/>
           </a:p>
@@ -6333,7 +6333,7 @@
                   <a:srgbClr val="556B82"/>
                 </a:solidFill>
               </a:rPr>
-              <a:t>Autorizações (04.06)</a:t>
+              <a:t>Autorizações (02.06)</a:t>
             </a:r>
             <a:endParaRPr lang="en-US" sz="1400" dirty="0"/>
           </a:p>
@@ -6351,7 +6351,7 @@
                   <a:srgbClr val="556B82"/>
                 </a:solidFill>
               </a:rPr>
-              <a:t>Herança, interfaces e factories (04.07)</a:t>
+              <a:t>Herança, interfaces e factories (02.07)</a:t>
             </a:r>
             <a:endParaRPr lang="en-US" sz="1400" dirty="0"/>
           </a:p>
@@ -6369,7 +6369,7 @@
                   <a:srgbClr val="556B82"/>
                 </a:solidFill>
               </a:rPr>
-              <a:t>ABAP Doc (04.09)</a:t>
+              <a:t>ABAP Doc (02.09)</a:t>
             </a:r>
             <a:endParaRPr lang="en-US" sz="1400" dirty="0"/>
           </a:p>
@@ -6651,7 +6651,7 @@
         <p:spPr>
           <a:xfrm>
             <a:off x="640080" y="1700784"/>
-            <a:ext cx="2231136" cy="292608"/>
+            <a:ext cx="2619756" cy="292608"/>
           </a:xfrm>
           <a:prstGeom prst="rect">
             <a:avLst/>
@@ -6671,7 +6671,7 @@
         <p:spPr>
           <a:xfrm>
             <a:off x="640080" y="1700784"/>
-            <a:ext cx="2231136" cy="27432"/>
+            <a:ext cx="2619756" cy="27432"/>
           </a:xfrm>
           <a:prstGeom prst="rect">
             <a:avLst/>
@@ -6691,7 +6691,7 @@
         <p:spPr>
           <a:xfrm>
             <a:off x="731520" y="1719072"/>
-            <a:ext cx="2048256" cy="274320"/>
+            <a:ext cx="2436876" cy="274320"/>
           </a:xfrm>
           <a:prstGeom prst="rect">
             <a:avLst/>
@@ -6712,7 +6712,7 @@
                   <a:srgbClr val="FFFFFF"/>
                 </a:solidFill>
               </a:rPr>
-              <a:t>zcl_04_flights.clas.abap</a:t>
+              <a:t>zcl_pc_estoque_demo.clas.abap</a:t>
             </a:r>
             <a:endParaRPr lang="en-US" sz="950" dirty="0"/>
           </a:p>
@@ -6748,7 +6748,7 @@
                   <a:srgbClr val="9DA5B4"/>
                 </a:solidFill>
               </a:rPr>
-              <a:t>ZS4D401_## › ZCL_04_FLIGHTS</a:t>
+              <a:t>Exemplo sobre o projeto Pedidos de Compras</a:t>
             </a:r>
             <a:endParaRPr lang="en-US" sz="850" dirty="0"/>
           </a:p>
@@ -7152,7 +7152,7 @@
                 <a:ea typeface="Courier New" pitchFamily="34" charset="-122"/>
                 <a:cs typeface="Courier New" pitchFamily="34" charset="-120"/>
               </a:rPr>
-              <a:t>"! Free seats per carrier, read from the protected view</a:t>
+              <a:t>"! Saldo disponível (estoque menos reservas) de um item</a:t>
             </a:r>
             <a:endParaRPr lang="en-US" sz="1050" dirty="0"/>
           </a:p>
@@ -7172,7 +7172,7 @@
                 <a:ea typeface="Courier New" pitchFamily="34" charset="-122"/>
                 <a:cs typeface="Courier New" pitchFamily="34" charset="-120"/>
               </a:rPr>
-              <a:t>"! @raising zcx_04_failed | Carrier not found or not authorized</a:t>
+              <a:t>"! @raising zcx_pc_msg | Item sem estoque disponível (mensagem 048)</a:t>
             </a:r>
             <a:endParaRPr lang="en-US" sz="1050" dirty="0"/>
           </a:p>
@@ -7214,7 +7214,7 @@
                 <a:ea typeface="Courier New" pitchFamily="34" charset="-122"/>
                 <a:cs typeface="Courier New" pitchFamily="34" charset="-120"/>
               </a:rPr>
-              <a:t>free_seats</a:t>
+              <a:t>saldo_disponivel</a:t>
             </a:r>
             <a:endParaRPr lang="en-US" sz="1050" dirty="0"/>
           </a:p>
@@ -7267,7 +7267,7 @@
                 <a:ea typeface="Courier New" pitchFamily="34" charset="-122"/>
                 <a:cs typeface="Courier New" pitchFamily="34" charset="-120"/>
               </a:rPr>
-              <a:t>i_carrier_id</a:t>
+              <a:t>iv_sku</a:t>
             </a:r>
             <a:r>
               <a:rPr lang="en-US" sz="1050" dirty="0">
@@ -7278,7 +7278,7 @@
                 <a:ea typeface="Courier New" pitchFamily="34" charset="-122"/>
                 <a:cs typeface="Courier New" pitchFamily="34" charset="-120"/>
               </a:rPr>
-              <a:t>    </a:t>
+              <a:t>         </a:t>
             </a:r>
             <a:r>
               <a:rPr lang="en-US" sz="1050" dirty="0">
@@ -7305,13 +7305,13 @@
             <a:r>
               <a:rPr lang="en-US" sz="1050" dirty="0">
                 <a:solidFill>
-                  <a:srgbClr val="4EC9B0"/>
-                </a:solidFill>
-                <a:latin typeface="Courier New" pitchFamily="34" charset="0"/>
-                <a:ea typeface="Courier New" pitchFamily="34" charset="-122"/>
-                <a:cs typeface="Courier New" pitchFamily="34" charset="-120"/>
-              </a:rPr>
-              <a:t>/dmo/carrier_id</a:t>
+                  <a:srgbClr val="CCCCCC"/>
+                </a:solidFill>
+                <a:latin typeface="Courier New" pitchFamily="34" charset="0"/>
+                <a:ea typeface="Courier New" pitchFamily="34" charset="-122"/>
+                <a:cs typeface="Courier New" pitchFamily="34" charset="-120"/>
+              </a:rPr>
+              <a:t>zta_pc_item-sku</a:t>
             </a:r>
             <a:endParaRPr lang="en-US" sz="1050" dirty="0"/>
           </a:p>
@@ -7386,7 +7386,7 @@
                 <a:ea typeface="Courier New" pitchFamily="34" charset="-122"/>
                 <a:cs typeface="Courier New" pitchFamily="34" charset="-120"/>
               </a:rPr>
-              <a:t>r_result</a:t>
+              <a:t>rv_qtde</a:t>
             </a:r>
             <a:r>
               <a:rPr lang="en-US" sz="1050" dirty="0">
@@ -7494,7 +7494,7 @@
                 <a:ea typeface="Courier New" pitchFamily="34" charset="-122"/>
                 <a:cs typeface="Courier New" pitchFamily="34" charset="-120"/>
               </a:rPr>
-              <a:t>zcx_04_failed</a:t>
+              <a:t>zcx_pc_msg</a:t>
             </a:r>
             <a:r>
               <a:rPr lang="en-US" sz="1050" dirty="0">
@@ -7567,7 +7567,7 @@
                 <a:ea typeface="Courier New" pitchFamily="34" charset="-122"/>
                 <a:cs typeface="Courier New" pitchFamily="34" charset="-120"/>
               </a:rPr>
-              <a:t>free_seats</a:t>
+              <a:t>saldo_disponivel</a:t>
             </a:r>
             <a:r>
               <a:rPr lang="en-US" sz="1050" dirty="0">
@@ -7631,6 +7631,28 @@
                 <a:ea typeface="Courier New" pitchFamily="34" charset="-122"/>
                 <a:cs typeface="Courier New" pitchFamily="34" charset="-120"/>
               </a:rPr>
+              <a:t>SINGLE</a:t>
+            </a:r>
+            <a:r>
+              <a:rPr lang="en-US" sz="1050" dirty="0">
+                <a:solidFill>
+                  <a:srgbClr val="CCCCCC"/>
+                </a:solidFill>
+                <a:latin typeface="Courier New" pitchFamily="34" charset="0"/>
+                <a:ea typeface="Courier New" pitchFamily="34" charset="-122"/>
+                <a:cs typeface="Courier New" pitchFamily="34" charset="-120"/>
+              </a:rPr>
+              <a:t> </a:t>
+            </a:r>
+            <a:r>
+              <a:rPr lang="en-US" sz="1050" dirty="0">
+                <a:solidFill>
+                  <a:srgbClr val="569CD6"/>
+                </a:solidFill>
+                <a:latin typeface="Courier New" pitchFamily="34" charset="0"/>
+                <a:ea typeface="Courier New" pitchFamily="34" charset="-122"/>
+                <a:cs typeface="Courier New" pitchFamily="34" charset="-120"/>
+              </a:rPr>
               <a:t>FROM</a:t>
             </a:r>
             <a:r>
@@ -7647,13 +7669,13 @@
             <a:r>
               <a:rPr lang="en-US" sz="1050" dirty="0">
                 <a:solidFill>
-                  <a:srgbClr val="4EC9B0"/>
-                </a:solidFill>
-                <a:latin typeface="Courier New" pitchFamily="34" charset="0"/>
-                <a:ea typeface="Courier New" pitchFamily="34" charset="-122"/>
-                <a:cs typeface="Courier New" pitchFamily="34" charset="-120"/>
-              </a:rPr>
-              <a:t>/dmo/i_flight</a:t>
+                  <a:srgbClr val="CCCCCC"/>
+                </a:solidFill>
+                <a:latin typeface="Courier New" pitchFamily="34" charset="0"/>
+                <a:ea typeface="Courier New" pitchFamily="34" charset="-122"/>
+                <a:cs typeface="Courier New" pitchFamily="34" charset="-120"/>
+              </a:rPr>
+              <a:t>zr_pc_item</a:t>
             </a:r>
             <a:endParaRPr lang="en-US" sz="1050" dirty="0"/>
           </a:p>
@@ -7700,24 +7722,13 @@
             <a:r>
               <a:rPr lang="en-US" sz="1050" dirty="0">
                 <a:solidFill>
-                  <a:srgbClr val="569CD6"/>
-                </a:solidFill>
-                <a:latin typeface="Courier New" pitchFamily="34" charset="0"/>
-                <a:ea typeface="Courier New" pitchFamily="34" charset="-122"/>
-                <a:cs typeface="Courier New" pitchFamily="34" charset="-120"/>
-              </a:rPr>
-              <a:t>SUM</a:t>
-            </a:r>
-            <a:r>
-              <a:rPr lang="en-US" sz="1050" dirty="0">
-                <a:solidFill>
                   <a:srgbClr val="CCCCCC"/>
                 </a:solidFill>
                 <a:latin typeface="Courier New" pitchFamily="34" charset="0"/>
                 <a:ea typeface="Courier New" pitchFamily="34" charset="-122"/>
                 <a:cs typeface="Courier New" pitchFamily="34" charset="-120"/>
               </a:rPr>
-              <a:t>(</a:t>
+              <a:t>QtdeEstoque</a:t>
             </a:r>
             <a:r>
               <a:rPr lang="en-US" sz="1050" dirty="0">
@@ -7739,7 +7750,7 @@
                 <a:ea typeface="Courier New" pitchFamily="34" charset="-122"/>
                 <a:cs typeface="Courier New" pitchFamily="34" charset="-120"/>
               </a:rPr>
-              <a:t>MaximumSeats</a:t>
+              <a:t>-</a:t>
             </a:r>
             <a:r>
               <a:rPr lang="en-US" sz="1050" dirty="0">
@@ -7761,51 +7772,7 @@
                 <a:ea typeface="Courier New" pitchFamily="34" charset="-122"/>
                 <a:cs typeface="Courier New" pitchFamily="34" charset="-120"/>
               </a:rPr>
-              <a:t>-</a:t>
-            </a:r>
-            <a:r>
-              <a:rPr lang="en-US" sz="1050" dirty="0">
-                <a:solidFill>
-                  <a:srgbClr val="CCCCCC"/>
-                </a:solidFill>
-                <a:latin typeface="Courier New" pitchFamily="34" charset="0"/>
-                <a:ea typeface="Courier New" pitchFamily="34" charset="-122"/>
-                <a:cs typeface="Courier New" pitchFamily="34" charset="-120"/>
-              </a:rPr>
-              <a:t> </a:t>
-            </a:r>
-            <a:r>
-              <a:rPr lang="en-US" sz="1050" dirty="0">
-                <a:solidFill>
-                  <a:srgbClr val="CCCCCC"/>
-                </a:solidFill>
-                <a:latin typeface="Courier New" pitchFamily="34" charset="0"/>
-                <a:ea typeface="Courier New" pitchFamily="34" charset="-122"/>
-                <a:cs typeface="Courier New" pitchFamily="34" charset="-120"/>
-              </a:rPr>
-              <a:t>OccupiedSeats</a:t>
-            </a:r>
-            <a:r>
-              <a:rPr lang="en-US" sz="1050" dirty="0">
-                <a:solidFill>
-                  <a:srgbClr val="CCCCCC"/>
-                </a:solidFill>
-                <a:latin typeface="Courier New" pitchFamily="34" charset="0"/>
-                <a:ea typeface="Courier New" pitchFamily="34" charset="-122"/>
-                <a:cs typeface="Courier New" pitchFamily="34" charset="-120"/>
-              </a:rPr>
-              <a:t> </a:t>
-            </a:r>
-            <a:r>
-              <a:rPr lang="en-US" sz="1050" dirty="0">
-                <a:solidFill>
-                  <a:srgbClr val="CCCCCC"/>
-                </a:solidFill>
-                <a:latin typeface="Courier New" pitchFamily="34" charset="0"/>
-                <a:ea typeface="Courier New" pitchFamily="34" charset="-122"/>
-                <a:cs typeface="Courier New" pitchFamily="34" charset="-120"/>
-              </a:rPr>
-              <a:t>)</a:t>
+              <a:t>QtdeReservada</a:t>
             </a:r>
             <a:endParaRPr lang="en-US" sz="1050" dirty="0"/>
           </a:p>
@@ -7858,7 +7825,7 @@
                 <a:ea typeface="Courier New" pitchFamily="34" charset="-122"/>
                 <a:cs typeface="Courier New" pitchFamily="34" charset="-120"/>
               </a:rPr>
-              <a:t>AirlineID</a:t>
+              <a:t>Sku</a:t>
             </a:r>
             <a:r>
               <a:rPr lang="en-US" sz="1050" dirty="0">
@@ -7913,7 +7880,7 @@
                 <a:ea typeface="Courier New" pitchFamily="34" charset="-122"/>
                 <a:cs typeface="Courier New" pitchFamily="34" charset="-120"/>
               </a:rPr>
-              <a:t>i_carrier_id</a:t>
+              <a:t>iv_sku</a:t>
             </a:r>
             <a:endParaRPr lang="en-US" sz="1050" dirty="0"/>
           </a:p>
@@ -7977,7 +7944,7 @@
                 <a:ea typeface="Courier New" pitchFamily="34" charset="-122"/>
                 <a:cs typeface="Courier New" pitchFamily="34" charset="-120"/>
               </a:rPr>
-              <a:t>r_result</a:t>
+              <a:t>rv_qtde</a:t>
             </a:r>
             <a:r>
               <a:rPr lang="en-US" sz="1050" dirty="0">
@@ -8041,7 +8008,7 @@
                 <a:ea typeface="Courier New" pitchFamily="34" charset="-122"/>
                 <a:cs typeface="Courier New" pitchFamily="34" charset="-120"/>
               </a:rPr>
-              <a:t>r_result</a:t>
+              <a:t>rv_qtde</a:t>
             </a:r>
             <a:r>
               <a:rPr lang="en-US" sz="1050" dirty="0">
@@ -8057,35 +8024,46 @@
             <a:r>
               <a:rPr lang="en-US" sz="1050" dirty="0">
                 <a:solidFill>
-                  <a:srgbClr val="569CD6"/>
-                </a:solidFill>
-                <a:latin typeface="Courier New" pitchFamily="34" charset="0"/>
-                <a:ea typeface="Courier New" pitchFamily="34" charset="-122"/>
-                <a:cs typeface="Courier New" pitchFamily="34" charset="-120"/>
-              </a:rPr>
-              <a:t>IS</a:t>
-            </a:r>
-            <a:r>
-              <a:rPr lang="en-US" sz="1050" dirty="0">
-                <a:solidFill>
                   <a:srgbClr val="CCCCCC"/>
                 </a:solidFill>
                 <a:latin typeface="Courier New" pitchFamily="34" charset="0"/>
                 <a:ea typeface="Courier New" pitchFamily="34" charset="-122"/>
                 <a:cs typeface="Courier New" pitchFamily="34" charset="-120"/>
               </a:rPr>
+              <a:t>&lt;</a:t>
+            </a:r>
+            <a:r>
+              <a:rPr lang="en-US" sz="1050" dirty="0">
+                <a:solidFill>
+                  <a:srgbClr val="CCCCCC"/>
+                </a:solidFill>
+                <a:latin typeface="Courier New" pitchFamily="34" charset="0"/>
+                <a:ea typeface="Courier New" pitchFamily="34" charset="-122"/>
+                <a:cs typeface="Courier New" pitchFamily="34" charset="-120"/>
+              </a:rPr>
+              <a:t>=</a:t>
+            </a:r>
+            <a:r>
+              <a:rPr lang="en-US" sz="1050" dirty="0">
+                <a:solidFill>
+                  <a:srgbClr val="CCCCCC"/>
+                </a:solidFill>
+                <a:latin typeface="Courier New" pitchFamily="34" charset="0"/>
+                <a:ea typeface="Courier New" pitchFamily="34" charset="-122"/>
+                <a:cs typeface="Courier New" pitchFamily="34" charset="-120"/>
+              </a:rPr>
               <a:t> </a:t>
             </a:r>
             <a:r>
               <a:rPr lang="en-US" sz="1050" dirty="0">
                 <a:solidFill>
-                  <a:srgbClr val="569CD6"/>
-                </a:solidFill>
-                <a:latin typeface="Courier New" pitchFamily="34" charset="0"/>
-                <a:ea typeface="Courier New" pitchFamily="34" charset="-122"/>
-                <a:cs typeface="Courier New" pitchFamily="34" charset="-120"/>
-              </a:rPr>
-              <a:t>INITIAL</a:t>
+                  <a:srgbClr val="B5CEA8"/>
+                </a:solidFill>
+                <a:latin typeface="Courier New" pitchFamily="34" charset="0"/>
+                <a:ea typeface="Courier New" pitchFamily="34" charset="-122"/>
+                <a:cs typeface="Courier New" pitchFamily="34" charset="-120"/>
+              </a:rPr>
+              <a:t>0</a:t>
             </a:r>
             <a:r>
               <a:rPr lang="en-US" sz="1050" dirty="0">
@@ -8171,7 +8149,7 @@
                 <a:ea typeface="Courier New" pitchFamily="34" charset="-122"/>
                 <a:cs typeface="Courier New" pitchFamily="34" charset="-120"/>
               </a:rPr>
-              <a:t>TYPE</a:t>
+              <a:t>NEW</a:t>
             </a:r>
             <a:r>
               <a:rPr lang="en-US" sz="1050" dirty="0">
@@ -8193,7 +8171,18 @@
                 <a:ea typeface="Courier New" pitchFamily="34" charset="-122"/>
                 <a:cs typeface="Courier New" pitchFamily="34" charset="-120"/>
               </a:rPr>
-              <a:t>zcx_04_failed</a:t>
+              <a:t>zcx_pc_msg</a:t>
+            </a:r>
+            <a:r>
+              <a:rPr lang="en-US" sz="1050" dirty="0">
+                <a:solidFill>
+                  <a:srgbClr val="CCCCCC"/>
+                </a:solidFill>
+                <a:latin typeface="Courier New" pitchFamily="34" charset="0"/>
+                <a:ea typeface="Courier New" pitchFamily="34" charset="-122"/>
+                <a:cs typeface="Courier New" pitchFamily="34" charset="-120"/>
+              </a:rPr>
+              <a:t>(</a:t>
             </a:r>
             <a:endParaRPr lang="en-US" sz="1050" dirty="0"/>
           </a:p>
@@ -8218,23 +8207,23 @@
             <a:r>
               <a:rPr lang="en-US" sz="1050" dirty="0">
                 <a:solidFill>
-                  <a:srgbClr val="569CD6"/>
-                </a:solidFill>
-                <a:latin typeface="Courier New" pitchFamily="34" charset="0"/>
-                <a:ea typeface="Courier New" pitchFamily="34" charset="-122"/>
-                <a:cs typeface="Courier New" pitchFamily="34" charset="-120"/>
-              </a:rPr>
-              <a:t>EXPORTING</a:t>
-            </a:r>
-            <a:r>
-              <a:rPr lang="en-US" sz="1050" dirty="0">
-                <a:solidFill>
                   <a:srgbClr val="CCCCCC"/>
                 </a:solidFill>
                 <a:latin typeface="Courier New" pitchFamily="34" charset="0"/>
                 <a:ea typeface="Courier New" pitchFamily="34" charset="-122"/>
                 <a:cs typeface="Courier New" pitchFamily="34" charset="-120"/>
               </a:rPr>
+              <a:t>textid</a:t>
+            </a:r>
+            <a:r>
+              <a:rPr lang="en-US" sz="1050" dirty="0">
+                <a:solidFill>
+                  <a:srgbClr val="CCCCCC"/>
+                </a:solidFill>
+                <a:latin typeface="Courier New" pitchFamily="34" charset="0"/>
+                <a:ea typeface="Courier New" pitchFamily="34" charset="-122"/>
+                <a:cs typeface="Courier New" pitchFamily="34" charset="-120"/>
+              </a:rPr>
               <a:t> </a:t>
             </a:r>
             <a:r>
@@ -8246,7 +8235,7 @@
                 <a:ea typeface="Courier New" pitchFamily="34" charset="-122"/>
                 <a:cs typeface="Courier New" pitchFamily="34" charset="-120"/>
               </a:rPr>
-              <a:t>carrier_id</a:t>
+              <a:t>=</a:t>
             </a:r>
             <a:r>
               <a:rPr lang="en-US" sz="1050" dirty="0">
@@ -8262,12 +8251,67 @@
             <a:r>
               <a:rPr lang="en-US" sz="1050" dirty="0">
                 <a:solidFill>
+                  <a:srgbClr val="4EC9B0"/>
+                </a:solidFill>
+                <a:latin typeface="Courier New" pitchFamily="34" charset="0"/>
+                <a:ea typeface="Courier New" pitchFamily="34" charset="-122"/>
+                <a:cs typeface="Courier New" pitchFamily="34" charset="-120"/>
+              </a:rPr>
+              <a:t>zif_pc_msg=&gt;</a:t>
+            </a:r>
+            <a:r>
+              <a:rPr lang="en-US" sz="1050" dirty="0">
+                <a:solidFill>
                   <a:srgbClr val="CCCCCC"/>
                 </a:solidFill>
                 <a:latin typeface="Courier New" pitchFamily="34" charset="0"/>
                 <a:ea typeface="Courier New" pitchFamily="34" charset="-122"/>
                 <a:cs typeface="Courier New" pitchFamily="34" charset="-120"/>
               </a:rPr>
+              <a:t>item_sem_estoque</a:t>
+            </a:r>
+            <a:r>
+              <a:rPr lang="en-US" sz="1050" dirty="0">
+                <a:solidFill>
+                  <a:srgbClr val="CCCCCC"/>
+                </a:solidFill>
+                <a:latin typeface="Courier New" pitchFamily="34" charset="0"/>
+                <a:ea typeface="Courier New" pitchFamily="34" charset="-122"/>
+                <a:cs typeface="Courier New" pitchFamily="34" charset="-120"/>
+              </a:rPr>
+              <a:t> </a:t>
+            </a:r>
+            <a:r>
+              <a:rPr lang="en-US" sz="1050" dirty="0">
+                <a:solidFill>
+                  <a:srgbClr val="CCCCCC"/>
+                </a:solidFill>
+                <a:latin typeface="Courier New" pitchFamily="34" charset="0"/>
+                <a:ea typeface="Courier New" pitchFamily="34" charset="-122"/>
+                <a:cs typeface="Courier New" pitchFamily="34" charset="-120"/>
+              </a:rPr>
+              <a:t>attr1</a:t>
+            </a:r>
+            <a:r>
+              <a:rPr lang="en-US" sz="1050" dirty="0">
+                <a:solidFill>
+                  <a:srgbClr val="CCCCCC"/>
+                </a:solidFill>
+                <a:latin typeface="Courier New" pitchFamily="34" charset="0"/>
+                <a:ea typeface="Courier New" pitchFamily="34" charset="-122"/>
+                <a:cs typeface="Courier New" pitchFamily="34" charset="-120"/>
+              </a:rPr>
+              <a:t> </a:t>
+            </a:r>
+            <a:r>
+              <a:rPr lang="en-US" sz="1050" dirty="0">
+                <a:solidFill>
+                  <a:srgbClr val="CCCCCC"/>
+                </a:solidFill>
+                <a:latin typeface="Courier New" pitchFamily="34" charset="0"/>
+                <a:ea typeface="Courier New" pitchFamily="34" charset="-122"/>
+                <a:cs typeface="Courier New" pitchFamily="34" charset="-120"/>
+              </a:rPr>
               <a:t>=</a:t>
             </a:r>
             <a:r>
@@ -8290,7 +8334,29 @@
                 <a:ea typeface="Courier New" pitchFamily="34" charset="-122"/>
                 <a:cs typeface="Courier New" pitchFamily="34" charset="-120"/>
               </a:rPr>
-              <a:t>i_carrier_id</a:t>
+              <a:t>iv_sku</a:t>
+            </a:r>
+            <a:r>
+              <a:rPr lang="en-US" sz="1050" dirty="0">
+                <a:solidFill>
+                  <a:srgbClr val="CCCCCC"/>
+                </a:solidFill>
+                <a:latin typeface="Courier New" pitchFamily="34" charset="0"/>
+                <a:ea typeface="Courier New" pitchFamily="34" charset="-122"/>
+                <a:cs typeface="Courier New" pitchFamily="34" charset="-120"/>
+              </a:rPr>
+              <a:t> </a:t>
+            </a:r>
+            <a:r>
+              <a:rPr lang="en-US" sz="1050" dirty="0">
+                <a:solidFill>
+                  <a:srgbClr val="CCCCCC"/>
+                </a:solidFill>
+                <a:latin typeface="Courier New" pitchFamily="34" charset="0"/>
+                <a:ea typeface="Courier New" pitchFamily="34" charset="-122"/>
+                <a:cs typeface="Courier New" pitchFamily="34" charset="-120"/>
+              </a:rPr>
+              <a:t>)</a:t>
             </a:r>
             <a:r>
               <a:rPr lang="en-US" sz="1050" dirty="0">
@@ -8503,7 +8569,7 @@
                   <a:srgbClr val="1D2D3E"/>
                 </a:solidFill>
               </a:rPr>
-              <a:t>ABAP Doc · 04.09</a:t>
+              <a:t>ABAP Doc · 02.09</a:t>
             </a:r>
             <a:endParaRPr lang="en-US" sz="1400" dirty="0"/>
           </a:p>
@@ -8631,7 +8697,7 @@
                   <a:srgbClr val="1D2D3E"/>
                 </a:solidFill>
               </a:rPr>
-              <a:t>Code pushdown · 04.04</a:t>
+              <a:t>Code pushdown · 02.04</a:t>
             </a:r>
             <a:endParaRPr lang="en-US" sz="1400" dirty="0"/>
           </a:p>
@@ -8645,7 +8711,7 @@
                   <a:srgbClr val="556B82"/>
                 </a:solidFill>
               </a:rPr>
-              <a:t>A soma é feita no banco; só um número volta.</a:t>
+              <a:t>A subtração é feita no banco; só um número volta.</a:t>
             </a:r>
             <a:endParaRPr lang="en-US" sz="1400" dirty="0"/>
           </a:p>
@@ -8740,7 +8806,7 @@
                   <a:srgbClr val="1D2D3E"/>
                 </a:solidFill>
               </a:rPr>
-              <a:t>Autorização · 04.06</a:t>
+              <a:t>Autorização · 02.06</a:t>
             </a:r>
             <a:endParaRPr lang="en-US" sz="1400" dirty="0"/>
           </a:p>
@@ -8754,7 +8820,26 @@
                   <a:srgbClr val="556B82"/>
                 </a:solidFill>
               </a:rPr>
-              <a:t>A view com access control só devolve o permitido.</a:t>
+              <a:t>Com access control na view, o </a:t>
+            </a:r>
+            <a:r>
+              <a:rPr lang="en-US" sz="1050" dirty="0">
+                <a:solidFill>
+                  <a:srgbClr val="0064D9"/>
+                </a:solidFill>
+                <a:latin typeface="Courier New" pitchFamily="34" charset="0"/>
+                <a:ea typeface="Courier New" pitchFamily="34" charset="-122"/>
+                <a:cs typeface="Courier New" pitchFamily="34" charset="-120"/>
+              </a:rPr>
+              <a:t>SELECT</a:t>
+            </a:r>
+            <a:r>
+              <a:rPr lang="en-US" sz="1050" dirty="0">
+                <a:solidFill>
+                  <a:srgbClr val="556B82"/>
+                </a:solidFill>
+              </a:rPr>
+              <a:t> só devolve o permitido.</a:t>
             </a:r>
             <a:endParaRPr lang="en-US" sz="1400" dirty="0"/>
           </a:p>
@@ -8849,7 +8934,7 @@
                   <a:srgbClr val="1D2D3E"/>
                 </a:solidFill>
               </a:rPr>
-              <a:t>Exceção · 04.08</a:t>
+              <a:t>Exceção · 02.08</a:t>
             </a:r>
             <a:endParaRPr lang="en-US" sz="1400" dirty="0"/>
           </a:p>
@@ -8860,10 +8945,21 @@
             <a:r>
               <a:rPr lang="en-US" sz="1050" dirty="0">
                 <a:solidFill>
+                  <a:srgbClr val="0064D9"/>
+                </a:solidFill>
+                <a:latin typeface="Courier New" pitchFamily="34" charset="0"/>
+                <a:ea typeface="Courier New" pitchFamily="34" charset="-122"/>
+                <a:cs typeface="Courier New" pitchFamily="34" charset="-120"/>
+              </a:rPr>
+              <a:t>ZCX_PC_MSG</a:t>
+            </a:r>
+            <a:r>
+              <a:rPr lang="en-US" sz="1050" dirty="0">
+                <a:solidFill>
                   <a:srgbClr val="556B82"/>
                 </a:solidFill>
               </a:rPr>
-              <a:t>Uma exceção da aplicação explica a falha.</a:t>
+              <a:t>, a exceção T100 do projeto, explica a falha.</a:t>
             </a:r>
             <a:endParaRPr lang="en-US" sz="1400" dirty="0"/>
           </a:p>
@@ -9619,7 +9715,7 @@
                   <a:srgbClr val="89D1FF"/>
                 </a:solidFill>
               </a:rPr>
-              <a:t>Próxima aula · 04.01  </a:t>
+              <a:t>Próxima aula · 02.01  </a:t>
             </a:r>
             <a:r>
               <a:rPr lang="en-US" sz="1500" dirty="0">
@@ -9673,7 +9769,7 @@
         </p:blipFill>
         <p:spPr>
           <a:xfrm>
-            <a:off x="822960" y="2926080"/>
+            <a:off x="6355080" y="1965960"/>
             <a:ext cx="256032" cy="256032"/>
           </a:xfrm>
           <a:prstGeom prst="rect">
@@ -9697,7 +9793,7 @@
         </p:blipFill>
         <p:spPr>
           <a:xfrm>
-            <a:off x="6355080" y="1965960"/>
+            <a:off x="822960" y="2926080"/>
             <a:ext cx="256032" cy="256032"/>
           </a:xfrm>
           <a:prstGeom prst="rect">
